--- a/docs/onboarding/Workbench_Onboarding_Technical.pptx
+++ b/docs/onboarding/Workbench_Onboarding_Technical.pptx
@@ -3920,7 +3920,7 @@
               </a:defRPr>
             </a:pPr>
             <a:r>
-              <a:t>Reviewers · Candidates (and inviting)</a:t>
+              <a:t>Reviewers · Invite Reviewers</a:t>
             </a:r>
           </a:p>
         </p:txBody>
@@ -4051,7 +4051,7 @@
               </a:defRPr>
             </a:pPr>
             <a:r>
-              <a:t>Reviewers · Candidates (+ invite)</a:t>
+              <a:t>Reviewers · Invite Reviewers</a:t>
             </a:r>
           </a:p>
         </p:txBody>
@@ -4089,7 +4089,7 @@
               </a:defRPr>
             </a:pPr>
             <a:r>
-              <a:t>Component: CandidatesPanel.js; roster from /api/reviewer-finder/my-candidates?requestId=.</a:t>
+              <a:t>Component: ReviewerInvitePanel.js; roster from /api/reviewer-finder/my-candidates?requestId=.</a:t>
             </a:r>
           </a:p>
           <a:p>
@@ -5574,7 +5574,7 @@
               </a:defRPr>
             </a:pPr>
             <a:r>
-              <a:t>Reviewers · Invite &amp; Track</a:t>
+              <a:t>Reviewers · Track Reviewers</a:t>
             </a:r>
           </a:p>
         </p:txBody>
@@ -5705,7 +5705,7 @@
               </a:defRPr>
             </a:pPr>
             <a:r>
-              <a:t>Invite &amp; Track + token TTL + reminders</a:t>
+              <a:t>Track Reviewers + token TTL + reminders</a:t>
             </a:r>
           </a:p>
         </p:txBody>
@@ -6279,7 +6279,7 @@
               </a:defRPr>
             </a:pPr>
             <a:r>
-              <a:t>Completed &amp; Status</a:t>
+              <a:t>Completion (in Track Reviewers) &amp; Status</a:t>
             </a:r>
           </a:p>
         </p:txBody>
@@ -6410,7 +6410,7 @@
               </a:defRPr>
             </a:pPr>
             <a:r>
-              <a:t>Completed list &amp; Status reflection</a:t>
+              <a:t>Completed reviews &amp; Status reflection</a:t>
             </a:r>
           </a:p>
         </p:txBody>
@@ -6448,7 +6448,7 @@
               </a:defRPr>
             </a:pPr>
             <a:r>
-              <a:t>Completed: reviews returned (review-manager reviewers feed; wmkf_accepted lifecycle).</a:t>
+              <a:t>Completed reviews show within Track Reviewers (no separate Completed tab): reviews returned via the review-manager reviewers feed; wmkf_accepted lifecycle.</a:t>
             </a:r>
           </a:p>
           <a:p>
@@ -7251,7 +7251,7 @@
               </a:defRPr>
             </a:pPr>
             <a:r>
-              <a:t>Tab + sub-tab selection is query-string driven: ?tab=reviewers&amp;sub=invite (deep-linkable).</a:t>
+              <a:t>Tab + sub-tab selection is query-string driven: ?tab=reviewers&amp;sub=track (deep-linkable; legacy sub=invite/completed normalize to track).</a:t>
             </a:r>
           </a:p>
           <a:p>
@@ -7281,7 +7281,7 @@
               </a:defRPr>
             </a:pPr>
             <a:r>
-              <a:t>OverviewTab · ProposalTab · ReviewersTab · StatusTab · AwardeeTab (shared/components/...).</a:t>
+              <a:t>OverviewTab · ProposalTab · ReviewersTab · ReviewsTab · StatusTab · AwardeeTab (shared/components/...).</a:t>
             </a:r>
           </a:p>
           <a:p>
@@ -7296,7 +7296,7 @@
               </a:defRPr>
             </a:pPr>
             <a:r>
-              <a:t>The other 5 tab keys fall through to a "coming in a later update" card.</a:t>
+              <a:t>The other 4 tab keys fall through to a "coming in a later update" card.</a:t>
             </a:r>
           </a:p>
           <a:p>

--- a/docs/onboarding/Workbench_Onboarding_Technical.pptx
+++ b/docs/onboarding/Workbench_Onboarding_Technical.pptx
@@ -2,43 +2,43 @@
 <file path=ppt/presentation.xml><?xml version="1.0" encoding="utf-8"?>
 <p:presentation xmlns:p="http://schemas.openxmlformats.org/presentationml/2006/main">
   <p:sldMasterIdLst>
-    <p:sldMasterId xmlns:r="http://schemas.openxmlformats.org/officeDocument/2006/relationships" id="2147483648" r:id="R954f733794044ad6"/>
+    <p:sldMasterId xmlns:r="http://schemas.openxmlformats.org/officeDocument/2006/relationships" id="2147483648" r:id="Rfb8fe97c37a74530"/>
   </p:sldMasterIdLst>
   <p:notesMasterIdLst>
-    <p:notesMasterId xmlns:r="http://schemas.openxmlformats.org/officeDocument/2006/relationships" r:id="R82ccc7f072c44ba7"/>
+    <p:notesMasterId xmlns:r="http://schemas.openxmlformats.org/officeDocument/2006/relationships" r:id="R40d3686a4d464c0d"/>
   </p:notesMasterIdLst>
   <p:sldIdLst>
-    <p:sldId xmlns:r="http://schemas.openxmlformats.org/officeDocument/2006/relationships" id="256" r:id="R88d73c3e36c844e6"/>
-    <p:sldId xmlns:r="http://schemas.openxmlformats.org/officeDocument/2006/relationships" id="257" r:id="Ra9a82cbf3d344863"/>
-    <p:sldId xmlns:r="http://schemas.openxmlformats.org/officeDocument/2006/relationships" id="258" r:id="R3aea883533ec4ed5"/>
-    <p:sldId xmlns:r="http://schemas.openxmlformats.org/officeDocument/2006/relationships" id="259" r:id="Re8ae2a0289534618"/>
-    <p:sldId xmlns:r="http://schemas.openxmlformats.org/officeDocument/2006/relationships" id="260" r:id="Rb9691171d6e14219"/>
-    <p:sldId xmlns:r="http://schemas.openxmlformats.org/officeDocument/2006/relationships" id="261" r:id="R68e5e78544164540"/>
-    <p:sldId xmlns:r="http://schemas.openxmlformats.org/officeDocument/2006/relationships" id="262" r:id="R02e88c2ae7344772"/>
-    <p:sldId xmlns:r="http://schemas.openxmlformats.org/officeDocument/2006/relationships" id="263" r:id="Rc1d9f41d4cde4d17"/>
-    <p:sldId xmlns:r="http://schemas.openxmlformats.org/officeDocument/2006/relationships" id="264" r:id="R8051e2c4951d4981"/>
-    <p:sldId xmlns:r="http://schemas.openxmlformats.org/officeDocument/2006/relationships" id="265" r:id="Rda8595ee972648fb"/>
-    <p:sldId xmlns:r="http://schemas.openxmlformats.org/officeDocument/2006/relationships" id="266" r:id="Rb27a1e3e232942ef"/>
-    <p:sldId xmlns:r="http://schemas.openxmlformats.org/officeDocument/2006/relationships" id="267" r:id="Rc798f47da40146a6"/>
-    <p:sldId xmlns:r="http://schemas.openxmlformats.org/officeDocument/2006/relationships" id="268" r:id="R592e1acdbff745b8"/>
-    <p:sldId xmlns:r="http://schemas.openxmlformats.org/officeDocument/2006/relationships" id="269" r:id="R2bf4dc48ab87440e"/>
-    <p:sldId xmlns:r="http://schemas.openxmlformats.org/officeDocument/2006/relationships" id="270" r:id="R6830d5602d6d45ee"/>
-    <p:sldId xmlns:r="http://schemas.openxmlformats.org/officeDocument/2006/relationships" id="271" r:id="Rbd031f364dd24d54"/>
-    <p:sldId xmlns:r="http://schemas.openxmlformats.org/officeDocument/2006/relationships" id="272" r:id="R264d74daf0984dea"/>
-    <p:sldId xmlns:r="http://schemas.openxmlformats.org/officeDocument/2006/relationships" id="273" r:id="R9027a02efa8d4c0d"/>
-    <p:sldId xmlns:r="http://schemas.openxmlformats.org/officeDocument/2006/relationships" id="274" r:id="Rcd222d5ab11f45a0"/>
-    <p:sldId xmlns:r="http://schemas.openxmlformats.org/officeDocument/2006/relationships" id="275" r:id="R86d4cc802e7e40a4"/>
-    <p:sldId xmlns:r="http://schemas.openxmlformats.org/officeDocument/2006/relationships" id="276" r:id="R3c9a50b94cbd4e2e"/>
-    <p:sldId xmlns:r="http://schemas.openxmlformats.org/officeDocument/2006/relationships" id="277" r:id="Reb8ec7b785e14750"/>
-    <p:sldId xmlns:r="http://schemas.openxmlformats.org/officeDocument/2006/relationships" id="278" r:id="Rbf11b4bcefb1446f"/>
-    <p:sldId xmlns:r="http://schemas.openxmlformats.org/officeDocument/2006/relationships" id="279" r:id="R357a06c6e79748c5"/>
-    <p:sldId xmlns:r="http://schemas.openxmlformats.org/officeDocument/2006/relationships" id="280" r:id="R5b7c4bcec1d74549"/>
-    <p:sldId xmlns:r="http://schemas.openxmlformats.org/officeDocument/2006/relationships" id="281" r:id="Rc5c193c186ef4e09"/>
-    <p:sldId xmlns:r="http://schemas.openxmlformats.org/officeDocument/2006/relationships" id="282" r:id="R4211c38376474d8a"/>
-    <p:sldId xmlns:r="http://schemas.openxmlformats.org/officeDocument/2006/relationships" id="283" r:id="R06d41529a10c4116"/>
-    <p:sldId xmlns:r="http://schemas.openxmlformats.org/officeDocument/2006/relationships" id="284" r:id="R45953d47e3b84154"/>
-    <p:sldId xmlns:r="http://schemas.openxmlformats.org/officeDocument/2006/relationships" id="285" r:id="R6d6694029fc2420a"/>
-    <p:sldId xmlns:r="http://schemas.openxmlformats.org/officeDocument/2006/relationships" id="286" r:id="Re4d23bad796e42af"/>
+    <p:sldId xmlns:r="http://schemas.openxmlformats.org/officeDocument/2006/relationships" id="256" r:id="Rbb59ff104b4d48f1"/>
+    <p:sldId xmlns:r="http://schemas.openxmlformats.org/officeDocument/2006/relationships" id="257" r:id="R64cdcb96cffe44a7"/>
+    <p:sldId xmlns:r="http://schemas.openxmlformats.org/officeDocument/2006/relationships" id="258" r:id="Ra2653ead603049b5"/>
+    <p:sldId xmlns:r="http://schemas.openxmlformats.org/officeDocument/2006/relationships" id="259" r:id="R5118609727724151"/>
+    <p:sldId xmlns:r="http://schemas.openxmlformats.org/officeDocument/2006/relationships" id="260" r:id="Rf0dfada516d34bf0"/>
+    <p:sldId xmlns:r="http://schemas.openxmlformats.org/officeDocument/2006/relationships" id="261" r:id="Rf890ff401b774fe9"/>
+    <p:sldId xmlns:r="http://schemas.openxmlformats.org/officeDocument/2006/relationships" id="262" r:id="R785022af31304838"/>
+    <p:sldId xmlns:r="http://schemas.openxmlformats.org/officeDocument/2006/relationships" id="263" r:id="Rf563e1fff7f04a9c"/>
+    <p:sldId xmlns:r="http://schemas.openxmlformats.org/officeDocument/2006/relationships" id="264" r:id="R3c5e75a8621140bc"/>
+    <p:sldId xmlns:r="http://schemas.openxmlformats.org/officeDocument/2006/relationships" id="265" r:id="Rabda1f4781694474"/>
+    <p:sldId xmlns:r="http://schemas.openxmlformats.org/officeDocument/2006/relationships" id="266" r:id="R304236c76c4c4bbf"/>
+    <p:sldId xmlns:r="http://schemas.openxmlformats.org/officeDocument/2006/relationships" id="267" r:id="Rbea4c1e0b8004698"/>
+    <p:sldId xmlns:r="http://schemas.openxmlformats.org/officeDocument/2006/relationships" id="268" r:id="R346f15b264f44edd"/>
+    <p:sldId xmlns:r="http://schemas.openxmlformats.org/officeDocument/2006/relationships" id="269" r:id="Rf2e1b670abb44929"/>
+    <p:sldId xmlns:r="http://schemas.openxmlformats.org/officeDocument/2006/relationships" id="270" r:id="Rdaa73123908049b4"/>
+    <p:sldId xmlns:r="http://schemas.openxmlformats.org/officeDocument/2006/relationships" id="271" r:id="R101327201403452f"/>
+    <p:sldId xmlns:r="http://schemas.openxmlformats.org/officeDocument/2006/relationships" id="272" r:id="R0fa06658826545b6"/>
+    <p:sldId xmlns:r="http://schemas.openxmlformats.org/officeDocument/2006/relationships" id="273" r:id="Ra1c771899aee40b0"/>
+    <p:sldId xmlns:r="http://schemas.openxmlformats.org/officeDocument/2006/relationships" id="274" r:id="R3b562ebb75ed4e40"/>
+    <p:sldId xmlns:r="http://schemas.openxmlformats.org/officeDocument/2006/relationships" id="275" r:id="R5a69c58e84184f72"/>
+    <p:sldId xmlns:r="http://schemas.openxmlformats.org/officeDocument/2006/relationships" id="276" r:id="R2d289226ce4f42e7"/>
+    <p:sldId xmlns:r="http://schemas.openxmlformats.org/officeDocument/2006/relationships" id="277" r:id="Rf2178e17fb874276"/>
+    <p:sldId xmlns:r="http://schemas.openxmlformats.org/officeDocument/2006/relationships" id="278" r:id="Rf97dc1add4484683"/>
+    <p:sldId xmlns:r="http://schemas.openxmlformats.org/officeDocument/2006/relationships" id="279" r:id="R3cda9a654b9a4512"/>
+    <p:sldId xmlns:r="http://schemas.openxmlformats.org/officeDocument/2006/relationships" id="280" r:id="R54b2e3223d3a449a"/>
+    <p:sldId xmlns:r="http://schemas.openxmlformats.org/officeDocument/2006/relationships" id="281" r:id="R07df513644d443a1"/>
+    <p:sldId xmlns:r="http://schemas.openxmlformats.org/officeDocument/2006/relationships" id="282" r:id="Rfbf648c230ee40ec"/>
+    <p:sldId xmlns:r="http://schemas.openxmlformats.org/officeDocument/2006/relationships" id="283" r:id="R604eb2cb09384a69"/>
+    <p:sldId xmlns:r="http://schemas.openxmlformats.org/officeDocument/2006/relationships" id="284" r:id="R20fec5350a7d4329"/>
+    <p:sldId xmlns:r="http://schemas.openxmlformats.org/officeDocument/2006/relationships" id="285" r:id="R5d8e9a94248444b4"/>
+    <p:sldId xmlns:r="http://schemas.openxmlformats.org/officeDocument/2006/relationships" id="286" r:id="Rfd232d0c5d574d60"/>
   </p:sldIdLst>
   <p:sldSz cx="12191695" cy="6858000"/>
   <p:notesSz cx="6858000" cy="9144000"/>
@@ -5427,17 +5427,17 @@
   </p:cSld>
   <p:clrMap bg1="lt1" tx1="dk1" bg2="lt2" tx2="dk2" accent1="accent1" accent2="accent2" accent3="accent3" accent4="accent4" accent5="accent5" accent6="accent6" hlink="hlink" folHlink="folHlink"/>
   <p:sldLayoutIdLst>
-    <p:sldLayoutId xmlns:r="http://schemas.openxmlformats.org/officeDocument/2006/relationships" id="2147483649" r:id="Rdaad46a9d4cb443e"/>
-    <p:sldLayoutId xmlns:r="http://schemas.openxmlformats.org/officeDocument/2006/relationships" id="2147483650" r:id="R5359250ed5124769"/>
-    <p:sldLayoutId xmlns:r="http://schemas.openxmlformats.org/officeDocument/2006/relationships" id="2147483651" r:id="Ra94eea2e3c4d4476"/>
-    <p:sldLayoutId xmlns:r="http://schemas.openxmlformats.org/officeDocument/2006/relationships" id="2147483652" r:id="R39d0847460e8476e"/>
-    <p:sldLayoutId xmlns:r="http://schemas.openxmlformats.org/officeDocument/2006/relationships" id="2147483653" r:id="Ra9fdc03830964613"/>
-    <p:sldLayoutId xmlns:r="http://schemas.openxmlformats.org/officeDocument/2006/relationships" id="2147483654" r:id="R91dde43bfed5448a"/>
-    <p:sldLayoutId xmlns:r="http://schemas.openxmlformats.org/officeDocument/2006/relationships" id="2147483655" r:id="R941cc16b9d2c4fb6"/>
-    <p:sldLayoutId xmlns:r="http://schemas.openxmlformats.org/officeDocument/2006/relationships" id="2147483656" r:id="R6c46b0932cb040cf"/>
-    <p:sldLayoutId xmlns:r="http://schemas.openxmlformats.org/officeDocument/2006/relationships" id="2147483657" r:id="Rc32779271f8742f6"/>
-    <p:sldLayoutId xmlns:r="http://schemas.openxmlformats.org/officeDocument/2006/relationships" id="2147483658" r:id="R9d83fa1e15734a03"/>
-    <p:sldLayoutId xmlns:r="http://schemas.openxmlformats.org/officeDocument/2006/relationships" id="2147483659" r:id="R04fcaa63e52f464e"/>
+    <p:sldLayoutId xmlns:r="http://schemas.openxmlformats.org/officeDocument/2006/relationships" id="2147483649" r:id="R6ab88a5bc49b40d3"/>
+    <p:sldLayoutId xmlns:r="http://schemas.openxmlformats.org/officeDocument/2006/relationships" id="2147483650" r:id="Rc3d78e7aa0f74768"/>
+    <p:sldLayoutId xmlns:r="http://schemas.openxmlformats.org/officeDocument/2006/relationships" id="2147483651" r:id="Rbc62082a6b94497b"/>
+    <p:sldLayoutId xmlns:r="http://schemas.openxmlformats.org/officeDocument/2006/relationships" id="2147483652" r:id="R417774b0d19e436b"/>
+    <p:sldLayoutId xmlns:r="http://schemas.openxmlformats.org/officeDocument/2006/relationships" id="2147483653" r:id="R11502f5d0042479e"/>
+    <p:sldLayoutId xmlns:r="http://schemas.openxmlformats.org/officeDocument/2006/relationships" id="2147483654" r:id="R9177fa6c3df44cd5"/>
+    <p:sldLayoutId xmlns:r="http://schemas.openxmlformats.org/officeDocument/2006/relationships" id="2147483655" r:id="Raff32a7e8ff44fe3"/>
+    <p:sldLayoutId xmlns:r="http://schemas.openxmlformats.org/officeDocument/2006/relationships" id="2147483656" r:id="R8e6e20426fd64a87"/>
+    <p:sldLayoutId xmlns:r="http://schemas.openxmlformats.org/officeDocument/2006/relationships" id="2147483657" r:id="Rc9a1afa37840474b"/>
+    <p:sldLayoutId xmlns:r="http://schemas.openxmlformats.org/officeDocument/2006/relationships" id="2147483658" r:id="R11f30985dfae494e"/>
+    <p:sldLayoutId xmlns:r="http://schemas.openxmlformats.org/officeDocument/2006/relationships" id="2147483659" r:id="Re4dae8afd1c2436f"/>
   </p:sldLayoutIdLst>
   <p:txStyles>
     <p:titleStyle>
@@ -7212,7 +7212,7 @@
               </a:defRPr>
             </a:pPr>
             <a:r>
-              <a:t>S277: the manual "Re-invite already-invited" button was REMOVED;</a:t>
+              <a:t>S277: the manual "Re-invite already-invited" button was removed;</a:t>
             </a:r>
           </a:p>
           <a:p xmlns:a="http://schemas.openxmlformats.org/drawingml/2006/main">
@@ -7228,7 +7228,7 @@
               </a:defRPr>
             </a:pPr>
             <a:r>
-              <a:t>server allowResend re-mint contract retained (shouldSkipDuplicateInvitation) for programmatic re-mint only.</a:t>
+              <a:t>the allowResend re-mint path remains callable but is frozen during the hold.</a:t>
             </a:r>
           </a:p>
         </p:txBody>
@@ -7665,7 +7665,7 @@
               </a:defRPr>
             </a:pPr>
             <a:r>
-              <a:t>Discrete columns (not a JSON blob) so the cron/sweep can $filter server-side.</a:t>
+              <a:t>CampaignConfigModal exposes timing/quota only; reminder controls are absent and both flags default true.</a:t>
             </a:r>
           </a:p>
         </p:txBody>
@@ -9202,7 +9202,7 @@
               </a:defRPr>
             </a:pPr>
             <a:r>
-              <a:t>Reminders cron: /api/cron/reviewer-reminders (daily) → lib/services/reviewer-reminder-sweep.js.</a:t>
+              <a:t>Reminder route is implemented but unscheduled; manual token-issuing reminders/resends are frozen.</a:t>
             </a:r>
           </a:p>
           <a:p xmlns:a="http://schemas.openxmlformats.org/drawingml/2006/main">
@@ -11274,7 +11274,7 @@
               </a:defRPr>
             </a:pPr>
             <a:r>
-              <a:t>Crons in pages/api/cron/: reviewer-reminders (daily), sweep-stale-invites (status bookkeeping at meeting date).</a:t>
+              <a:t>reviewer-reminders route remains implemented but is unscheduled; sweep-stale-invites still runs for status bookkeeping.</a:t>
             </a:r>
           </a:p>
           <a:p xmlns:a="http://schemas.openxmlformats.org/drawingml/2006/main">
@@ -11322,7 +11322,7 @@
               </a:defRPr>
             </a:pPr>
             <a:r>
-              <a:t>Reminder/quota writes use If-Match claim-before-send for at-most-once semantics.</a:t>
+              <a:t>Prebuild + CI hold gate blocks accidental reviewer-reminder cron re-registration.</a:t>
             </a:r>
           </a:p>
         </p:txBody>
@@ -11532,7 +11532,7 @@
               </a:defRPr>
             </a:pPr>
             <a:r>
-              <a:t>Spec: docs/REVIEWER_ENGAGEMENT_SPEC.md (status: IMPLEMENTED, all 4 phases LIVE S275).</a:t>
+              <a:t>Spec: docs/REVIEWER_ENGAGEMENT_SPEC.md (Phases 1/2/4 live; Phase 3 mechanism implemented, schedule paused).</a:t>
             </a:r>
           </a:p>
           <a:p xmlns:a="http://schemas.openxmlformats.org/drawingml/2006/main">

--- a/docs/onboarding/Workbench_Onboarding_Technical.pptx
+++ b/docs/onboarding/Workbench_Onboarding_Technical.pptx
@@ -4134,7 +4134,22 @@
               </a:defRPr>
             </a:pPr>
             <a:r>
-              <a:t>S277: the manual "Re-invite already-invited" button was removed in favor of the per-reviewer Send reminder action;</a:t>
+              <a:t>S277: the manual "Re-invite already-invited" button was removed when the automated respond-by reminder was introduced;</a:t>
+            </a:r>
+          </a:p>
+          <a:p>
+            <a:pPr lvl="1">
+              <a:spcBef>
+                <a:spcPts val="200"/>
+              </a:spcBef>
+              <a:defRPr sz="1400">
+                <a:solidFill>
+                  <a:srgbClr val="555F6B"/>
+                </a:solidFill>
+              </a:defRPr>
+            </a:pPr>
+            <a:r>
+              <a:t>RespondReminderModal (imported only here, Invite Reviewers) now covers the unanswered-invitee nudge, minting a fresh link.</a:t>
             </a:r>
           </a:p>
           <a:p>
@@ -7266,7 +7281,7 @@
               </a:defRPr>
             </a:pPr>
             <a:r>
-              <a:t>Implemented tab components:</a:t>
+              <a:t>Implemented tab components (all nine keys are live, none fall through):</a:t>
             </a:r>
           </a:p>
           <a:p>
@@ -7281,7 +7296,7 @@
               </a:defRPr>
             </a:pPr>
             <a:r>
-              <a:t>OverviewTab · ProposalTab · InitialAssessmentTab · ReviewersTab · ReviewsTab · StatusTab · AwardeeTab (shared/components/...).</a:t>
+              <a:t>OverviewTab · ProposalTab · InitialAssessmentTab · ReviewersTab · ReviewsTab ·</a:t>
             </a:r>
           </a:p>
           <a:p>
@@ -7296,7 +7311,22 @@
               </a:defRPr>
             </a:pPr>
             <a:r>
-              <a:t>The other 3 tab keys fall through to a "coming in a later update" card.</a:t>
+              <a:t>StaffDeliberationsTab · FinalWriteupTab · StatusTab · AwardeeTab (shared/components/...).</a:t>
+            </a:r>
+          </a:p>
+          <a:p>
+            <a:pPr lvl="1">
+              <a:spcBef>
+                <a:spcPts val="200"/>
+              </a:spcBef>
+              <a:defRPr sz="1400">
+                <a:solidFill>
+                  <a:srgbClr val="555F6B"/>
+                </a:solidFill>
+              </a:defRPr>
+            </a:pPr>
+            <a:r>
+              <a:t>Legacy pre-site-visit/site-visit deep links alias to staff-deliberations (S466 merge).</a:t>
             </a:r>
           </a:p>
           <a:p>

--- a/docs/onboarding/Workbench_Onboarding_Technical.pptx
+++ b/docs/onboarding/Workbench_Onboarding_Technical.pptx
@@ -7296,22 +7296,7 @@
               </a:defRPr>
             </a:pPr>
             <a:r>
-              <a:t>OverviewTab · ProposalTab · InitialAssessmentTab · ReviewersTab · ReviewsTab ·</a:t>
-            </a:r>
-          </a:p>
-          <a:p>
-            <a:pPr lvl="1">
-              <a:spcBef>
-                <a:spcPts val="200"/>
-              </a:spcBef>
-              <a:defRPr sz="1400">
-                <a:solidFill>
-                  <a:srgbClr val="555F6B"/>
-                </a:solidFill>
-              </a:defRPr>
-            </a:pPr>
-            <a:r>
-              <a:t>StaffDeliberationsTab · FinalWriteupTab · StatusTab · AwardeeTab (shared/components/...).</a:t>
+              <a:t>OverviewTab · ProposalTab · InitialAssessmentTab · ReviewersTab · ReviewsTab · StaffDeliberationsTab · FinalWriteupTab · StatusTab · AwardeeTab (shared/components/...).</a:t>
             </a:r>
           </a:p>
           <a:p>

--- a/docs/onboarding/Workbench_Onboarding_Technical.pptx
+++ b/docs/onboarding/Workbench_Onboarding_Technical.pptx
@@ -6463,7 +6463,22 @@
               </a:defRPr>
             </a:pPr>
             <a:r>
-              <a:t>Completed reviews show within Track Reviewers (no separate Completed tab): reviews returned via the review-manager reviewers feed; wmkf_accepted lifecycle.</a:t>
+              <a:t>Track Reviewers (no separate Completed tab) holds both states: wmkf_reviewstatus review_received (returned, not yet closed out) and complete.</a:t>
+            </a:r>
+          </a:p>
+          <a:p>
+            <a:pPr lvl="1">
+              <a:spcBef>
+                <a:spcPts val="200"/>
+              </a:spcBef>
+              <a:defRPr sz="1400">
+                <a:solidFill>
+                  <a:srgbClr val="555F6B"/>
+                </a:solidFill>
+              </a:defRPr>
+            </a:pPr>
+            <a:r>
+              <a:t>ReviewerCloseoutModal -&gt; POST close-review: one ETag-bound write sets reviewStatus:'complete' + completedAt + honorariumEligibility (+ notes); never writes the honorarium request itself.</a:t>
             </a:r>
           </a:p>
           <a:p>
@@ -7938,7 +7953,7 @@
               </a:defRPr>
             </a:pPr>
             <a:r>
-              <a:t>Page is wrapped in RequireAppAccess appKey="reviewers".</a:t>
+              <a:t>Page is wrapped in RequireAppAccess appKey="reviewers" — one gate for the whole page, not per tab.</a:t>
             </a:r>
           </a:p>
           <a:p>
@@ -7953,7 +7968,7 @@
               </a:defRPr>
             </a:pPr>
             <a:r>
-              <a:t>Per-user app grants live in Dataverse (admin-managed); the same filter gates tab visibility.</a:t>
+              <a:t>Per-user app grants live in Dataverse (admin-managed); the tab strip itself is NOT filtered — all nine tabs render for anyone with the grant.</a:t>
             </a:r>
           </a:p>
           <a:p>
@@ -7983,7 +7998,7 @@
               </a:defRPr>
             </a:pPr>
             <a:r>
-              <a:t>canManage is computed (reviewer-modes) to gate write actions vs. read-only viewers.</a:t>
+              <a:t>canManage is computed (reviewer-modes) and passed only into the Reviewers tab, to gate write actions vs. read-only viewers there.</a:t>
             </a:r>
           </a:p>
         </p:txBody>
